--- a/output/example.com/report.pptx
+++ b/output/example.com/report.pptx
@@ -1305,7 +1305,7 @@
                   <a:srgbClr val="475467"/>
                 </a:solidFill>
               </a:rPr>
-              <a:t>Scanned at: 2026-03-03T12:11:27.191Z</a:t>
+              <a:t>Scanned at: 2026-03-05T09:10:39.312Z</a:t>
             </a:r>
             <a:endParaRPr lang="en-US" sz="1100" dirty="0"/>
           </a:p>
